--- a/pptx/midterm/REMUS_Background_Slide_3.pptx
+++ b/pptx/midterm/REMUS_Background_Slide_3.pptx
@@ -5,10 +5,10 @@
     <p:sldMasterId xmlns:r="http://schemas.openxmlformats.org/officeDocument/2006/relationships" id="2147483648" r:id="rId1"/>
   </p:sldMasterIdLst>
   <p:notesMasterIdLst>
-    <p:notesMasterId r:id="R8736984644b74825"/>
+    <p:notesMasterId r:id="R212a244efb3e4b20"/>
   </p:notesMasterIdLst>
   <p:sldIdLst>
-    <p:sldId id="256" r:id="R33b404721afa41d7"/>
+    <p:sldId id="256" r:id="R5ba09894fa3141b0"/>
   </p:sldIdLst>
   <p:sldSz cx="12192000" cy="6858000" type="screen16x9"/>
   <p:notesSz cx="6858000" cy="9144000"/>
@@ -471,7 +471,7 @@
           <a:p xmlns:a="http://schemas.openxmlformats.org/drawingml/2006/main">
             <a:r>
               <a:rPr lang="en-US"/>
-              <a:t>This slide introduces research challenges, not completed REMUS results. DUT logical cycles must remain aligned despite cross-FPGA communication latency; the pulse is conceptual, not a measured clock waveform. Global pause requires all partitions at the same DUT cycle and drained links, providing a stable boundary. Local partition states must be mapped and aggregated into a global snapshot for restoration and deterministic replay. Partitioning must balance resources and cut size while controlling Partition Propagation Depth (PPD) through granularity. Multiple chip icons and the partitioned circuit illustrate the problem, not an experimentally verified FPGA count. Reference: figure/presentation-reference/midterm-background-03.png.</a:t>
+              <a:t>This slide introduces research challenges, not completed REMUS results. DUT logical cycles must remain aligned despite cross-FPGA communication latency; the pulse is conceptual, not a measured clock waveform. Global pause requires all partitions at the same DUT cycle and drained links, providing a stable boundary. Local partition states must be mapped and aggregated into a global snapshot for restoration and deterministic replay. Partitioning must balance resources and cut size while limiting the maximum path-cut number through granularity selection. Multiple chip icons and the partitioned circuit illustrate the problem, not an experimentally verified FPGA count. Reference: figure/presentation-reference/midterm-background-03.png.</a:t>
             </a:r>
           </a:p>
         </p:txBody>
@@ -2036,7 +2036,7 @@
                 <a:latin typeface="Arial"/>
                 <a:ea typeface="Arial"/>
               </a:rPr>
-              <a:t>Control Partition</a:t>
+              <a:t>Limit Maximum</a:t>
             </a:r>
           </a:p>
           <a:p>
@@ -2048,7 +2048,7 @@
                 <a:latin typeface="Arial"/>
                 <a:ea typeface="Arial"/>
               </a:rPr>
-              <a:t>Propagation Depth (PPD)</a:t>
+              <a:t>Path-Cut Number</a:t>
             </a:r>
           </a:p>
           <a:p>
@@ -2074,7 +2074,7 @@
           <p:nvPr/>
         </p:nvPicPr>
         <p:blipFill>
-          <a:blip xmlns:r="http://schemas.openxmlformats.org/officeDocument/2006/relationships" r:embed="R8077effb218d4ed0"/>
+          <a:blip xmlns:r="http://schemas.openxmlformats.org/officeDocument/2006/relationships" r:embed="R8d5417393a42493c"/>
           <a:srcRect l="21371" t="23684" r="21291" b="20972"/>
           <a:stretch>
             <a:fillRect/>
@@ -2099,7 +2099,7 @@
           <p:nvPr/>
         </p:nvPicPr>
         <p:blipFill>
-          <a:blip xmlns:r="http://schemas.openxmlformats.org/officeDocument/2006/relationships" r:embed="Rc417c64d03794cc4"/>
+          <a:blip xmlns:r="http://schemas.openxmlformats.org/officeDocument/2006/relationships" r:embed="Ra01df5eb68734e8d"/>
           <a:srcRect l="21371" t="23684" r="21291" b="20972"/>
           <a:stretch>
             <a:fillRect/>
@@ -2124,7 +2124,7 @@
           <p:nvPr/>
         </p:nvPicPr>
         <p:blipFill>
-          <a:blip xmlns:r="http://schemas.openxmlformats.org/officeDocument/2006/relationships" r:embed="R76c29abcbffe4687"/>
+          <a:blip xmlns:r="http://schemas.openxmlformats.org/officeDocument/2006/relationships" r:embed="R5482d5069d554efb"/>
           <a:srcRect l="13078" t="10047" r="12918" b="10526"/>
           <a:stretch>
             <a:fillRect/>
@@ -2377,7 +2377,7 @@
           <p:nvPr/>
         </p:nvPicPr>
         <p:blipFill>
-          <a:blip xmlns:r="http://schemas.openxmlformats.org/officeDocument/2006/relationships" r:embed="R84c666b5e48d4577"/>
+          <a:blip xmlns:r="http://schemas.openxmlformats.org/officeDocument/2006/relationships" r:embed="R7046b2d9715a4035"/>
           <a:srcRect l="21371" t="23684" r="21291" b="20972"/>
           <a:stretch>
             <a:fillRect/>
@@ -2402,7 +2402,7 @@
           <p:nvPr/>
         </p:nvPicPr>
         <p:blipFill>
-          <a:blip xmlns:r="http://schemas.openxmlformats.org/officeDocument/2006/relationships" r:embed="R27a9b8d6feab476f"/>
+          <a:blip xmlns:r="http://schemas.openxmlformats.org/officeDocument/2006/relationships" r:embed="R3ff6785503204456"/>
           <a:srcRect l="21371" t="23684" r="21291" b="20972"/>
           <a:stretch>
             <a:fillRect/>
@@ -2427,7 +2427,7 @@
           <p:nvPr/>
         </p:nvPicPr>
         <p:blipFill>
-          <a:blip xmlns:r="http://schemas.openxmlformats.org/officeDocument/2006/relationships" r:embed="R2afb9644ba7a477c"/>
+          <a:blip xmlns:r="http://schemas.openxmlformats.org/officeDocument/2006/relationships" r:embed="R667a6785fa4d43ea"/>
           <a:srcRect l="21371" t="23684" r="21291" b="20972"/>
           <a:stretch>
             <a:fillRect/>
@@ -2524,7 +2524,7 @@
           <p:nvPr/>
         </p:nvPicPr>
         <p:blipFill>
-          <a:blip xmlns:r="http://schemas.openxmlformats.org/officeDocument/2006/relationships" r:embed="R31440147ed7845c0"/>
+          <a:blip xmlns:r="http://schemas.openxmlformats.org/officeDocument/2006/relationships" r:embed="R6955b8f66e414855"/>
           <a:srcRect l="11164" t="11323" r="10765" b="10606"/>
           <a:stretch>
             <a:fillRect/>
@@ -2588,7 +2588,7 @@
           <p:nvPr/>
         </p:nvPicPr>
         <p:blipFill>
-          <a:blip xmlns:r="http://schemas.openxmlformats.org/officeDocument/2006/relationships" r:embed="R7e2f816c7ca64fdf"/>
+          <a:blip xmlns:r="http://schemas.openxmlformats.org/officeDocument/2006/relationships" r:embed="R7a425e0eacc041c0"/>
           <a:srcRect l="21371" t="23684" r="21291" b="20972"/>
           <a:stretch>
             <a:fillRect/>
@@ -2613,7 +2613,7 @@
           <p:nvPr/>
         </p:nvPicPr>
         <p:blipFill>
-          <a:blip xmlns:r="http://schemas.openxmlformats.org/officeDocument/2006/relationships" r:embed="Re80b5aa27f754e36"/>
+          <a:blip xmlns:r="http://schemas.openxmlformats.org/officeDocument/2006/relationships" r:embed="R8403f77eda794ddf"/>
           <a:srcRect l="21371" t="23684" r="21291" b="20972"/>
           <a:stretch>
             <a:fillRect/>
@@ -2638,7 +2638,7 @@
           <p:nvPr/>
         </p:nvPicPr>
         <p:blipFill>
-          <a:blip xmlns:r="http://schemas.openxmlformats.org/officeDocument/2006/relationships" r:embed="Rbe68f538fd0f48bb"/>
+          <a:blip xmlns:r="http://schemas.openxmlformats.org/officeDocument/2006/relationships" r:embed="R9dc06439b26547b7"/>
           <a:srcRect l="21371" t="23684" r="21291" b="20972"/>
           <a:stretch>
             <a:fillRect/>
@@ -2702,7 +2702,7 @@
           <p:nvPr/>
         </p:nvPicPr>
         <p:blipFill>
-          <a:blip xmlns:r="http://schemas.openxmlformats.org/officeDocument/2006/relationships" r:embed="R71a329cefec54991"/>
+          <a:blip xmlns:r="http://schemas.openxmlformats.org/officeDocument/2006/relationships" r:embed="R00287ad319ca416b"/>
           <a:srcRect l="16746" t="16427" r="16746" b="11961"/>
           <a:stretch>
             <a:fillRect/>
@@ -2872,7 +2872,7 @@
           <p:nvPr/>
         </p:nvPicPr>
         <p:blipFill>
-          <a:blip xmlns:r="http://schemas.openxmlformats.org/officeDocument/2006/relationships" r:embed="R2f877a2370904d71"/>
+          <a:blip xmlns:r="http://schemas.openxmlformats.org/officeDocument/2006/relationships" r:embed="Rf5f4bc39c17343aa"/>
           <a:srcRect l="15869" t="18660" r="15789" b="18660"/>
           <a:stretch>
             <a:fillRect/>

--- a/pptx/midterm/REMUS_Background_Slide_3.pptx
+++ b/pptx/midterm/REMUS_Background_Slide_3.pptx
@@ -5,10 +5,10 @@
     <p:sldMasterId xmlns:r="http://schemas.openxmlformats.org/officeDocument/2006/relationships" id="2147483648" r:id="rId1"/>
   </p:sldMasterIdLst>
   <p:notesMasterIdLst>
-    <p:notesMasterId r:id="R212a244efb3e4b20"/>
+    <p:notesMasterId r:id="Rfe02a0bc03cb4816"/>
   </p:notesMasterIdLst>
   <p:sldIdLst>
-    <p:sldId id="256" r:id="R5ba09894fa3141b0"/>
+    <p:sldId id="256" r:id="Rf8089036ad7d4fd6"/>
   </p:sldIdLst>
   <p:sldSz cx="12192000" cy="6858000" type="screen16x9"/>
   <p:notesSz cx="6858000" cy="9144000"/>
@@ -775,8 +775,8 @@
 </file>
 
 <file path=ppt/slides/slide1.xml><?xml version="1.0" encoding="utf-8"?>
-<p:sld xmlns:a="http://schemas.openxmlformats.org/drawingml/2006/main" xmlns:p="http://schemas.openxmlformats.org/presentationml/2006/main">
-  <p:cSld>
+<p:sld xmlns:a="http://schemas.openxmlformats.org/drawingml/2006/main" xmlns:r="http://schemas.openxmlformats.org/officeDocument/2006/relationships" xmlns:p="http://schemas.openxmlformats.org/presentationml/2006/main">
+  <p:cSld xmlns:a="http://schemas.openxmlformats.org/drawingml/2006/main" xmlns:p="http://schemas.openxmlformats.org/presentationml/2006/main" xmlns:r="http://schemas.openxmlformats.org/officeDocument/2006/relationships">
     <p:bg>
       <p:bgPr>
         <a:solidFill xmlns:a="http://schemas.openxmlformats.org/drawingml/2006/main">
@@ -814,16 +814,45 @@
             <a:noAutofit/>
           </a:bodyPr>
           <a:lstStyle xmlns:a="http://schemas.openxmlformats.org/drawingml/2006/main"/>
-          <a:p xmlns:a="http://schemas.openxmlformats.org/drawingml/2006/main">
+          <a:p>
+            <a:pPr algn="l">
+              <a:lnSpc>
+                <a:spcPct val="90000"/>
+              </a:lnSpc>
+              <a:defRPr sz="3000" b="1">
+                <a:solidFill>
+                  <a:srgbClr val="183B56"/>
+                </a:solidFill>
+                <a:latin typeface="Arial"/>
+                <a:ea typeface="Arial"/>
+              </a:defRPr>
+            </a:pPr>
             <a:r>
               <a:rPr lang="en-US" sz="3000" b="1">
                 <a:solidFill>
                   <a:srgbClr val="183B56"/>
                 </a:solidFill>
                 <a:latin typeface="Arial"/>
-                <a:ea typeface="Arial"/>
-              </a:rPr>
-              <a:t>3. Key Challenges of Replayable Multi-FPGA Emulation</a:t>
+              </a:rPr>
+              <a:t xml:space="preserve">Key Challenges of </a:t>
+            </a:r>
+            <a:r>
+              <a:rPr lang="en-US" sz="3000" b="1">
+                <a:solidFill>
+                  <a:srgbClr val="183B56"/>
+                </a:solidFill>
+                <a:latin typeface="Arial"/>
+              </a:rPr>
+              <a:t>Replayable</a:t>
+            </a:r>
+            <a:r>
+              <a:rPr lang="en-US" sz="3000" b="1">
+                <a:solidFill>
+                  <a:srgbClr val="183B56"/>
+                </a:solidFill>
+                <a:latin typeface="Arial"/>
+              </a:rPr>
+              <a:t xml:space="preserve"> Multi-FPGA Emulation</a:t>
             </a:r>
           </a:p>
         </p:txBody>
@@ -873,7 +902,7 @@
         </p:nvSpPr>
         <p:spPr>
           <a:xfrm>
-            <a:off x="320040" y="1024128"/>
+            <a:off x="320040" y="939720"/>
             <a:ext cx="5687568" cy="2404872"/>
           </a:xfrm>
           <a:prstGeom prst="roundRect">
@@ -949,7 +978,7 @@
         </p:nvSpPr>
         <p:spPr>
           <a:xfrm>
-            <a:off x="2532888" y="1234440"/>
+            <a:off x="2504542" y="1234440"/>
             <a:ext cx="3264408" cy="640080"/>
           </a:xfrm>
           <a:prstGeom prst="rect">
@@ -966,27 +995,23 @@
           </a:bodyPr>
           <a:lstStyle/>
           <a:p>
-            <a:r>
-              <a:rPr lang="en-US" sz="2000" b="1">
+            <a:pPr algn="l">
+              <a:defRPr sz="2000" b="1">
                 <a:solidFill>
                   <a:srgbClr val="183B56"/>
                 </a:solidFill>
                 <a:latin typeface="Arial"/>
                 <a:ea typeface="Arial"/>
-              </a:rPr>
-              <a:t>Cycle-Accurate</a:t>
-            </a:r>
-          </a:p>
-          <a:p>
-            <a:r>
-              <a:rPr lang="en-US" sz="2000" b="1">
+              </a:defRPr>
+            </a:pPr>
+            <a:r>
+              <a:rPr sz="2000" b="1">
                 <a:solidFill>
                   <a:srgbClr val="183B56"/>
                 </a:solidFill>
                 <a:latin typeface="Arial"/>
-                <a:ea typeface="Arial"/>
-              </a:rPr>
-              <a:t>Execution</a:t>
+              </a:rPr>
+              <a:t>Cycle-Accurate Execution</a:t>
             </a:r>
           </a:p>
         </p:txBody>
@@ -999,7 +1024,7 @@
         </p:nvSpPr>
         <p:spPr>
           <a:xfrm>
-            <a:off x="2569464" y="2052828"/>
+            <a:off x="2569464" y="1968420"/>
             <a:ext cx="91440" cy="91440"/>
           </a:xfrm>
           <a:prstGeom prst="ellipse">
@@ -1036,7 +1061,7 @@
         </p:nvSpPr>
         <p:spPr>
           <a:xfrm>
-            <a:off x="2807208" y="1975104"/>
+            <a:off x="2807208" y="1890696"/>
             <a:ext cx="3017520" cy="557784"/>
           </a:xfrm>
           <a:prstGeom prst="rect">
@@ -1173,7 +1198,7 @@
         </p:nvSpPr>
         <p:spPr>
           <a:xfrm>
-            <a:off x="6190488" y="1024128"/>
+            <a:off x="6190488" y="946638"/>
             <a:ext cx="5687568" cy="2404872"/>
           </a:xfrm>
           <a:prstGeom prst="roundRect">
@@ -1212,7 +1237,7 @@
         </p:nvSpPr>
         <p:spPr>
           <a:xfrm>
-            <a:off x="8183880" y="1252728"/>
+            <a:off x="8183880" y="1175238"/>
             <a:ext cx="8230" cy="1947672"/>
           </a:xfrm>
           <a:prstGeom prst="rect">
@@ -1249,7 +1274,7 @@
         </p:nvSpPr>
         <p:spPr>
           <a:xfrm>
-            <a:off x="8403336" y="1234440"/>
+            <a:off x="8403336" y="1156950"/>
             <a:ext cx="3264408" cy="640080"/>
           </a:xfrm>
           <a:prstGeom prst="rect">
@@ -1299,7 +1324,7 @@
         </p:nvSpPr>
         <p:spPr>
           <a:xfrm>
-            <a:off x="8439912" y="2052828"/>
+            <a:off x="8439912" y="1975338"/>
             <a:ext cx="91440" cy="91440"/>
           </a:xfrm>
           <a:prstGeom prst="ellipse">
@@ -1336,7 +1361,7 @@
         </p:nvSpPr>
         <p:spPr>
           <a:xfrm>
-            <a:off x="8677656" y="1975104"/>
+            <a:off x="8677656" y="1897614"/>
             <a:ext cx="3017520" cy="557784"/>
           </a:xfrm>
           <a:prstGeom prst="rect">
@@ -1386,7 +1411,7 @@
         </p:nvSpPr>
         <p:spPr>
           <a:xfrm>
-            <a:off x="8439912" y="2674620"/>
+            <a:off x="8439912" y="2597130"/>
             <a:ext cx="91440" cy="91440"/>
           </a:xfrm>
           <a:prstGeom prst="ellipse">
@@ -1423,7 +1448,7 @@
         </p:nvSpPr>
         <p:spPr>
           <a:xfrm>
-            <a:off x="8677656" y="2596896"/>
+            <a:off x="8677656" y="2519406"/>
             <a:ext cx="3017520" cy="557784"/>
           </a:xfrm>
           <a:prstGeom prst="rect">
@@ -1440,27 +1465,38 @@
           </a:bodyPr>
           <a:lstStyle/>
           <a:p>
+            <a:pPr algn="l">
+              <a:defRPr sz="1700" b="0">
+                <a:solidFill>
+                  <a:srgbClr val="20354A"/>
+                </a:solidFill>
+                <a:latin typeface="Arial"/>
+                <a:ea typeface="Arial"/>
+              </a:defRPr>
+            </a:pPr>
             <a:r>
               <a:rPr lang="en-US" sz="1700">
                 <a:solidFill>
                   <a:srgbClr val="20354A"/>
                 </a:solidFill>
-                <a:latin typeface="Arial"/>
-                <a:ea typeface="Arial"/>
-              </a:rPr>
-              <a:t>Drain links for a stable</a:t>
-            </a:r>
-          </a:p>
-          <a:p>
+              </a:rPr>
+              <a:t>Internal states from different cycle</a:t>
+            </a:r>
             <a:r>
               <a:rPr lang="en-US" sz="1700">
                 <a:solidFill>
                   <a:srgbClr val="20354A"/>
                 </a:solidFill>
-                <a:latin typeface="Arial"/>
-                <a:ea typeface="Arial"/>
-              </a:rPr>
-              <a:t>snapshot boundary</a:t>
+              </a:rPr>
+              <a:t xml:space="preserve"> </a:t>
+            </a:r>
+            <a:r>
+              <a:rPr lang="en-US" sz="1700">
+                <a:solidFill>
+                  <a:srgbClr val="20354A"/>
+                </a:solidFill>
+              </a:rPr>
+              <a:t>can not be replayed</a:t>
             </a:r>
           </a:p>
         </p:txBody>
@@ -1473,7 +1509,7 @@
         </p:nvSpPr>
         <p:spPr>
           <a:xfrm>
-            <a:off x="320040" y="3675888"/>
+            <a:off x="320040" y="3644892"/>
             <a:ext cx="5687568" cy="2404872"/>
           </a:xfrm>
           <a:prstGeom prst="roundRect">
@@ -1512,7 +1548,7 @@
         </p:nvSpPr>
         <p:spPr>
           <a:xfrm>
-            <a:off x="2313432" y="3904488"/>
+            <a:off x="2313432" y="3873492"/>
             <a:ext cx="8230" cy="1947672"/>
           </a:xfrm>
           <a:prstGeom prst="rect">
@@ -1549,7 +1585,7 @@
         </p:nvSpPr>
         <p:spPr>
           <a:xfrm>
-            <a:off x="2532888" y="3886200"/>
+            <a:off x="2532888" y="3855204"/>
             <a:ext cx="3264408" cy="640080"/>
           </a:xfrm>
           <a:prstGeom prst="rect">
@@ -1599,7 +1635,7 @@
         </p:nvSpPr>
         <p:spPr>
           <a:xfrm>
-            <a:off x="2569464" y="4704588"/>
+            <a:off x="2569464" y="4828340"/>
             <a:ext cx="91440" cy="91440"/>
           </a:xfrm>
           <a:prstGeom prst="ellipse">
@@ -1636,7 +1672,7 @@
         </p:nvSpPr>
         <p:spPr>
           <a:xfrm>
-            <a:off x="2807208" y="4626864"/>
+            <a:off x="2807208" y="4750616"/>
             <a:ext cx="3017520" cy="557784"/>
           </a:xfrm>
           <a:prstGeom prst="rect">
@@ -1674,7 +1710,7 @@
         </p:nvSpPr>
         <p:spPr>
           <a:xfrm>
-            <a:off x="2569464" y="5326380"/>
+            <a:off x="2569464" y="5295384"/>
             <a:ext cx="91440" cy="91440"/>
           </a:xfrm>
           <a:prstGeom prst="ellipse">
@@ -1711,7 +1747,7 @@
         </p:nvSpPr>
         <p:spPr>
           <a:xfrm>
-            <a:off x="2807208" y="5248656"/>
+            <a:off x="2807208" y="5217660"/>
             <a:ext cx="3017520" cy="557784"/>
           </a:xfrm>
           <a:prstGeom prst="rect">
@@ -1761,7 +1797,7 @@
         </p:nvSpPr>
         <p:spPr>
           <a:xfrm>
-            <a:off x="6190488" y="3675888"/>
+            <a:off x="6190488" y="3644892"/>
             <a:ext cx="5687568" cy="2404872"/>
           </a:xfrm>
           <a:prstGeom prst="roundRect">
@@ -1800,7 +1836,7 @@
         </p:nvSpPr>
         <p:spPr>
           <a:xfrm>
-            <a:off x="8183880" y="3904488"/>
+            <a:off x="8183880" y="3873492"/>
             <a:ext cx="8230" cy="1947672"/>
           </a:xfrm>
           <a:prstGeom prst="rect">
@@ -1837,7 +1873,7 @@
         </p:nvSpPr>
         <p:spPr>
           <a:xfrm>
-            <a:off x="8403336" y="3886200"/>
+            <a:off x="8403336" y="3855204"/>
             <a:ext cx="3264408" cy="640080"/>
           </a:xfrm>
           <a:prstGeom prst="rect">
@@ -1854,27 +1890,23 @@
           </a:bodyPr>
           <a:lstStyle/>
           <a:p>
-            <a:r>
-              <a:rPr lang="en-US" sz="2000" b="1">
+            <a:pPr algn="l">
+              <a:defRPr sz="2000" b="1">
                 <a:solidFill>
                   <a:srgbClr val="183B56"/>
                 </a:solidFill>
                 <a:latin typeface="Arial"/>
                 <a:ea typeface="Arial"/>
-              </a:rPr>
-              <a:t>Automated</a:t>
-            </a:r>
-          </a:p>
-          <a:p>
-            <a:r>
-              <a:rPr lang="en-US" sz="2000" b="1">
+              </a:defRPr>
+            </a:pPr>
+            <a:r>
+              <a:rPr sz="2000" b="1">
                 <a:solidFill>
                   <a:srgbClr val="183B56"/>
                 </a:solidFill>
                 <a:latin typeface="Arial"/>
-                <a:ea typeface="Arial"/>
-              </a:rPr>
-              <a:t>Partitioning</a:t>
+              </a:rPr>
+              <a:t>Automated Partitioning</a:t>
             </a:r>
           </a:p>
         </p:txBody>
@@ -1887,7 +1919,7 @@
         </p:nvSpPr>
         <p:spPr>
           <a:xfrm>
-            <a:off x="8439912" y="4704588"/>
+            <a:off x="8439912" y="4504781"/>
             <a:ext cx="91440" cy="91440"/>
           </a:xfrm>
           <a:prstGeom prst="ellipse">
@@ -1924,7 +1956,7 @@
         </p:nvSpPr>
         <p:spPr>
           <a:xfrm>
-            <a:off x="8677656" y="4626864"/>
+            <a:off x="8677656" y="4427057"/>
             <a:ext cx="3017520" cy="557784"/>
           </a:xfrm>
           <a:prstGeom prst="rect">
@@ -1974,7 +2006,7 @@
         </p:nvSpPr>
         <p:spPr>
           <a:xfrm>
-            <a:off x="8439912" y="5326380"/>
+            <a:off x="8439912" y="5126573"/>
             <a:ext cx="91440" cy="91440"/>
           </a:xfrm>
           <a:prstGeom prst="ellipse">
@@ -2011,7 +2043,7 @@
         </p:nvSpPr>
         <p:spPr>
           <a:xfrm>
-            <a:off x="8677656" y="5248656"/>
+            <a:off x="8677656" y="5048849"/>
             <a:ext cx="3017520" cy="749808"/>
           </a:xfrm>
           <a:prstGeom prst="rect">
@@ -2028,39 +2060,23 @@
           </a:bodyPr>
           <a:lstStyle/>
           <a:p>
-            <a:r>
-              <a:rPr lang="en-US" sz="1700">
+            <a:pPr algn="l">
+              <a:defRPr sz="1700" b="0">
                 <a:solidFill>
                   <a:srgbClr val="20354A"/>
                 </a:solidFill>
                 <a:latin typeface="Arial"/>
                 <a:ea typeface="Arial"/>
-              </a:rPr>
-              <a:t>Limit Maximum</a:t>
-            </a:r>
-          </a:p>
-          <a:p>
-            <a:r>
-              <a:rPr lang="en-US" sz="1700">
+              </a:defRPr>
+            </a:pPr>
+            <a:r>
+              <a:rPr sz="1700">
                 <a:solidFill>
                   <a:srgbClr val="20354A"/>
                 </a:solidFill>
                 <a:latin typeface="Arial"/>
-                <a:ea typeface="Arial"/>
-              </a:rPr>
-              <a:t>Path-Cut Number</a:t>
-            </a:r>
-          </a:p>
-          <a:p>
-            <a:r>
-              <a:rPr lang="en-US" sz="1700">
-                <a:solidFill>
-                  <a:srgbClr val="20354A"/>
-                </a:solidFill>
-                <a:latin typeface="Arial"/>
-                <a:ea typeface="Arial"/>
-              </a:rPr>
-              <a:t>through granularity</a:t>
+              </a:rPr>
+              <a:t>Limit Maximum Path-Cut Number through granularity</a:t>
             </a:r>
           </a:p>
         </p:txBody>
@@ -2074,7 +2090,7 @@
           <p:nvPr/>
         </p:nvPicPr>
         <p:blipFill>
-          <a:blip xmlns:r="http://schemas.openxmlformats.org/officeDocument/2006/relationships" r:embed="R8d5417393a42493c"/>
+          <a:blip xmlns:r="http://schemas.openxmlformats.org/officeDocument/2006/relationships" r:embed="Rb144485caeb84593"/>
           <a:srcRect l="21371" t="23684" r="21291" b="20972"/>
           <a:stretch>
             <a:fillRect/>
@@ -2099,7 +2115,7 @@
           <p:nvPr/>
         </p:nvPicPr>
         <p:blipFill>
-          <a:blip xmlns:r="http://schemas.openxmlformats.org/officeDocument/2006/relationships" r:embed="Ra01df5eb68734e8d"/>
+          <a:blip xmlns:r="http://schemas.openxmlformats.org/officeDocument/2006/relationships" r:embed="Rf2553ab50a6a4a91"/>
           <a:srcRect l="21371" t="23684" r="21291" b="20972"/>
           <a:stretch>
             <a:fillRect/>
@@ -2124,7 +2140,7 @@
           <p:nvPr/>
         </p:nvPicPr>
         <p:blipFill>
-          <a:blip xmlns:r="http://schemas.openxmlformats.org/officeDocument/2006/relationships" r:embed="R5482d5069d554efb"/>
+          <a:blip xmlns:r="http://schemas.openxmlformats.org/officeDocument/2006/relationships" r:embed="Rf26cb0b57301460c"/>
           <a:srcRect l="13078" t="10047" r="12918" b="10526"/>
           <a:stretch>
             <a:fillRect/>
@@ -2354,16 +2370,23 @@
           </a:bodyPr>
           <a:lstStyle/>
           <a:p>
-            <a:pPr algn="ctr"/>
-            <a:r>
-              <a:rPr lang="en-US" sz="1400">
+            <a:pPr algn="ctr">
+              <a:defRPr sz="1400" b="0">
                 <a:solidFill>
                   <a:srgbClr val="183B56"/>
                 </a:solidFill>
                 <a:latin typeface="Arial"/>
                 <a:ea typeface="Arial"/>
-              </a:rPr>
-              <a:t>DUT cycle n</a:t>
+              </a:defRPr>
+            </a:pPr>
+            <a:r>
+              <a:rPr sz="1400">
+                <a:solidFill>
+                  <a:srgbClr val="183B56"/>
+                </a:solidFill>
+                <a:latin typeface="Arial"/>
+              </a:rPr>
+              <a:t>Same DUT cycle n</a:t>
             </a:r>
           </a:p>
         </p:txBody>
@@ -2377,7 +2400,7 @@
           <p:nvPr/>
         </p:nvPicPr>
         <p:blipFill>
-          <a:blip xmlns:r="http://schemas.openxmlformats.org/officeDocument/2006/relationships" r:embed="R7046b2d9715a4035"/>
+          <a:blip xmlns:r="http://schemas.openxmlformats.org/officeDocument/2006/relationships" r:embed="Rcdb761fd2a674750"/>
           <a:srcRect l="21371" t="23684" r="21291" b="20972"/>
           <a:stretch>
             <a:fillRect/>
@@ -2385,7 +2408,7 @@
         </p:blipFill>
         <p:spPr>
           <a:xfrm>
-            <a:off x="6922008" y="1353312"/>
+            <a:off x="6922008" y="1275822"/>
             <a:ext cx="539496" cy="520737"/>
           </a:xfrm>
           <a:prstGeom prst="rect">
@@ -2402,7 +2425,7 @@
           <p:nvPr/>
         </p:nvPicPr>
         <p:blipFill>
-          <a:blip xmlns:r="http://schemas.openxmlformats.org/officeDocument/2006/relationships" r:embed="R3ff6785503204456"/>
+          <a:blip xmlns:r="http://schemas.openxmlformats.org/officeDocument/2006/relationships" r:embed="R2a6d719ca21c4a6a"/>
           <a:srcRect l="21371" t="23684" r="21291" b="20972"/>
           <a:stretch>
             <a:fillRect/>
@@ -2410,7 +2433,7 @@
         </p:blipFill>
         <p:spPr>
           <a:xfrm>
-            <a:off x="6409944" y="2414016"/>
+            <a:off x="6409944" y="2336526"/>
             <a:ext cx="539496" cy="520737"/>
           </a:xfrm>
           <a:prstGeom prst="rect">
@@ -2427,7 +2450,7 @@
           <p:nvPr/>
         </p:nvPicPr>
         <p:blipFill>
-          <a:blip xmlns:r="http://schemas.openxmlformats.org/officeDocument/2006/relationships" r:embed="R667a6785fa4d43ea"/>
+          <a:blip xmlns:r="http://schemas.openxmlformats.org/officeDocument/2006/relationships" r:embed="Rb147318bc6da4c8d"/>
           <a:srcRect l="21371" t="23684" r="21291" b="20972"/>
           <a:stretch>
             <a:fillRect/>
@@ -2435,7 +2458,7 @@
         </p:blipFill>
         <p:spPr>
           <a:xfrm>
-            <a:off x="7434072" y="2414016"/>
+            <a:off x="7434072" y="2336526"/>
             <a:ext cx="539496" cy="520737"/>
           </a:xfrm>
           <a:prstGeom prst="rect">
@@ -2454,7 +2477,7 @@
         </p:nvCxnSpPr>
         <p:spPr>
           <a:xfrm flipH="1">
-            <a:off x="6679692" y="1874049"/>
+            <a:off x="6679692" y="1796559"/>
             <a:ext cx="512064" cy="539967"/>
           </a:xfrm>
           <a:prstGeom prst="straightConnector1">
@@ -2478,7 +2501,7 @@
         </p:nvCxnSpPr>
         <p:spPr>
           <a:xfrm>
-            <a:off x="7191756" y="1874049"/>
+            <a:off x="7191756" y="1796559"/>
             <a:ext cx="512064" cy="539967"/>
           </a:xfrm>
           <a:prstGeom prst="straightConnector1">
@@ -2502,7 +2525,7 @@
         </p:nvCxnSpPr>
         <p:spPr>
           <a:xfrm>
-            <a:off x="6949440" y="2674384"/>
+            <a:off x="6949440" y="2596894"/>
             <a:ext cx="484632" cy="0"/>
           </a:xfrm>
           <a:prstGeom prst="straightConnector1">
@@ -2524,7 +2547,7 @@
           <p:nvPr/>
         </p:nvPicPr>
         <p:blipFill>
-          <a:blip xmlns:r="http://schemas.openxmlformats.org/officeDocument/2006/relationships" r:embed="R6955b8f66e414855"/>
+          <a:blip xmlns:r="http://schemas.openxmlformats.org/officeDocument/2006/relationships" r:embed="Re43f698f7a5047dd"/>
           <a:srcRect l="11164" t="11323" r="10765" b="10606"/>
           <a:stretch>
             <a:fillRect/>
@@ -2532,7 +2555,7 @@
         </p:blipFill>
         <p:spPr>
           <a:xfrm>
-            <a:off x="6967728" y="1956816"/>
+            <a:off x="6967728" y="2020006"/>
             <a:ext cx="448056" cy="448056"/>
           </a:xfrm>
           <a:prstGeom prst="rect">
@@ -2548,7 +2571,7 @@
         </p:nvSpPr>
         <p:spPr>
           <a:xfrm>
-            <a:off x="6373368" y="3063240"/>
+            <a:off x="6373368" y="2985750"/>
             <a:ext cx="1645920" cy="256032"/>
           </a:xfrm>
           <a:prstGeom prst="rect">
@@ -2588,7 +2611,7 @@
           <p:nvPr/>
         </p:nvPicPr>
         <p:blipFill>
-          <a:blip xmlns:r="http://schemas.openxmlformats.org/officeDocument/2006/relationships" r:embed="R7a425e0eacc041c0"/>
+          <a:blip xmlns:r="http://schemas.openxmlformats.org/officeDocument/2006/relationships" r:embed="R44dc73d7393544e1"/>
           <a:srcRect l="21371" t="23684" r="21291" b="20972"/>
           <a:stretch>
             <a:fillRect/>
@@ -2596,7 +2619,7 @@
         </p:blipFill>
         <p:spPr>
           <a:xfrm>
-            <a:off x="484632" y="4251960"/>
+            <a:off x="484632" y="4220964"/>
             <a:ext cx="502920" cy="485433"/>
           </a:xfrm>
           <a:prstGeom prst="rect">
@@ -2613,7 +2636,7 @@
           <p:nvPr/>
         </p:nvPicPr>
         <p:blipFill>
-          <a:blip xmlns:r="http://schemas.openxmlformats.org/officeDocument/2006/relationships" r:embed="R8403f77eda794ddf"/>
+          <a:blip xmlns:r="http://schemas.openxmlformats.org/officeDocument/2006/relationships" r:embed="Rd011f53120cb4f57"/>
           <a:srcRect l="21371" t="23684" r="21291" b="20972"/>
           <a:stretch>
             <a:fillRect/>
@@ -2621,7 +2644,7 @@
         </p:blipFill>
         <p:spPr>
           <a:xfrm>
-            <a:off x="1106424" y="4251960"/>
+            <a:off x="1106424" y="4220964"/>
             <a:ext cx="502920" cy="485433"/>
           </a:xfrm>
           <a:prstGeom prst="rect">
@@ -2638,7 +2661,7 @@
           <p:nvPr/>
         </p:nvPicPr>
         <p:blipFill>
-          <a:blip xmlns:r="http://schemas.openxmlformats.org/officeDocument/2006/relationships" r:embed="R9dc06439b26547b7"/>
+          <a:blip xmlns:r="http://schemas.openxmlformats.org/officeDocument/2006/relationships" r:embed="R913b6df6eb66497a"/>
           <a:srcRect l="21371" t="23684" r="21291" b="20972"/>
           <a:stretch>
             <a:fillRect/>
@@ -2646,7 +2669,7 @@
         </p:blipFill>
         <p:spPr>
           <a:xfrm>
-            <a:off x="1728216" y="4251960"/>
+            <a:off x="1728216" y="4220964"/>
             <a:ext cx="502920" cy="485433"/>
           </a:xfrm>
           <a:prstGeom prst="rect">
@@ -2662,7 +2685,7 @@
         </p:nvSpPr>
         <p:spPr>
           <a:xfrm>
-            <a:off x="475488" y="3886200"/>
+            <a:off x="475488" y="3855204"/>
             <a:ext cx="1773936" cy="246888"/>
           </a:xfrm>
           <a:prstGeom prst="rect">
@@ -2702,7 +2725,7 @@
           <p:nvPr/>
         </p:nvPicPr>
         <p:blipFill>
-          <a:blip xmlns:r="http://schemas.openxmlformats.org/officeDocument/2006/relationships" r:embed="R00287ad319ca416b"/>
+          <a:blip xmlns:r="http://schemas.openxmlformats.org/officeDocument/2006/relationships" r:embed="Rd7d651cdb8f844b3"/>
           <a:srcRect l="16746" t="16427" r="16746" b="11961"/>
           <a:stretch>
             <a:fillRect/>
@@ -2710,7 +2733,7 @@
         </p:blipFill>
         <p:spPr>
           <a:xfrm>
-            <a:off x="1129284" y="5193792"/>
+            <a:off x="1129284" y="5162796"/>
             <a:ext cx="457200" cy="492285"/>
           </a:xfrm>
           <a:prstGeom prst="rect">
@@ -2726,7 +2749,7 @@
         </p:nvCxnSpPr>
         <p:spPr>
           <a:xfrm>
-            <a:off x="736092" y="4736592"/>
+            <a:off x="736092" y="4705596"/>
             <a:ext cx="0" cy="320040"/>
           </a:xfrm>
           <a:prstGeom prst="straightConnector1">
@@ -2747,7 +2770,7 @@
         </p:nvCxnSpPr>
         <p:spPr>
           <a:xfrm>
-            <a:off x="1357884" y="4736592"/>
+            <a:off x="1357884" y="4705596"/>
             <a:ext cx="0" cy="320040"/>
           </a:xfrm>
           <a:prstGeom prst="straightConnector1">
@@ -2768,7 +2791,7 @@
         </p:nvCxnSpPr>
         <p:spPr>
           <a:xfrm>
-            <a:off x="1979676" y="4736592"/>
+            <a:off x="1979676" y="4705596"/>
             <a:ext cx="0" cy="320040"/>
           </a:xfrm>
           <a:prstGeom prst="straightConnector1">
@@ -2789,7 +2812,7 @@
         </p:nvCxnSpPr>
         <p:spPr>
           <a:xfrm>
-            <a:off x="736092" y="5056632"/>
+            <a:off x="736092" y="5025636"/>
             <a:ext cx="1243584" cy="0"/>
           </a:xfrm>
           <a:prstGeom prst="straightConnector1">
@@ -2810,7 +2833,7 @@
         </p:nvCxnSpPr>
         <p:spPr>
           <a:xfrm>
-            <a:off x="1357884" y="5056632"/>
+            <a:off x="1357884" y="5025636"/>
             <a:ext cx="0" cy="137160"/>
           </a:xfrm>
           <a:prstGeom prst="straightConnector1">
@@ -2832,7 +2855,7 @@
         </p:nvSpPr>
         <p:spPr>
           <a:xfrm>
-            <a:off x="475488" y="5760720"/>
+            <a:off x="475488" y="5729724"/>
             <a:ext cx="1773936" cy="228600"/>
           </a:xfrm>
           <a:prstGeom prst="rect">
@@ -2872,7 +2895,7 @@
           <p:nvPr/>
         </p:nvPicPr>
         <p:blipFill>
-          <a:blip xmlns:r="http://schemas.openxmlformats.org/officeDocument/2006/relationships" r:embed="Rf5f4bc39c17343aa"/>
+          <a:blip xmlns:r="http://schemas.openxmlformats.org/officeDocument/2006/relationships" r:embed="R35795b82282b4a83"/>
           <a:srcRect l="15869" t="18660" r="15789" b="18660"/>
           <a:stretch>
             <a:fillRect/>
@@ -2880,7 +2903,7 @@
         </p:blipFill>
         <p:spPr>
           <a:xfrm>
-            <a:off x="6455664" y="4288536"/>
+            <a:off x="6455664" y="4074660"/>
             <a:ext cx="1481328" cy="1358605"/>
           </a:xfrm>
           <a:prstGeom prst="rect">
@@ -2896,7 +2919,7 @@
         </p:nvSpPr>
         <p:spPr>
           <a:xfrm>
-            <a:off x="6373368" y="5852160"/>
+            <a:off x="6373368" y="5638280"/>
             <a:ext cx="1682496" cy="246888"/>
           </a:xfrm>
           <a:prstGeom prst="rect">
@@ -2935,7 +2958,7 @@
         </p:nvSpPr>
         <p:spPr>
           <a:xfrm>
-            <a:off x="502920" y="6355080"/>
+            <a:off x="804672" y="6309360"/>
             <a:ext cx="11155680" cy="320040"/>
           </a:xfrm>
           <a:prstGeom prst="rect">
@@ -2952,16 +2975,38 @@
           </a:bodyPr>
           <a:lstStyle/>
           <a:p>
-            <a:pPr algn="ctr"/>
-            <a:r>
-              <a:rPr lang="en-US" sz="1800" b="1">
+            <a:pPr algn="l">
+              <a:defRPr sz="1800" b="1">
                 <a:solidFill>
                   <a:srgbClr val="183B56"/>
                 </a:solidFill>
                 <a:latin typeface="Arial"/>
                 <a:ea typeface="Arial"/>
-              </a:rPr>
-              <a:t>Replayable emulation requires scalable deployment and globally coordinated debugging.</a:t>
+              </a:defRPr>
+            </a:pPr>
+            <a:r>
+              <a:rPr lang="en-US" b="1">
+                <a:solidFill>
+                  <a:srgbClr val="183B56"/>
+                </a:solidFill>
+              </a:rPr>
+              <a:t>Academe</a:t>
+            </a:r>
+            <a:r>
+              <a:rPr lang="en-US" b="1">
+                <a:solidFill>
+                  <a:srgbClr val="183B56"/>
+                </a:solidFill>
+              </a:rPr>
+              <a:t xml:space="preserve"> </a:t>
+            </a:r>
+            <a:r>
+              <a:rPr lang="en-US" b="1">
+                <a:solidFill>
+                  <a:srgbClr val="183B56"/>
+                </a:solidFill>
+              </a:rPr>
+              <a:t>have made progress in individual fields, still gaps in Multi-FPGA Emulation system.</a:t>
             </a:r>
           </a:p>
         </p:txBody>

--- a/pptx/midterm/REMUS_Background_Slide_3.pptx
+++ b/pptx/midterm/REMUS_Background_Slide_3.pptx
@@ -5,10 +5,10 @@
     <p:sldMasterId xmlns:r="http://schemas.openxmlformats.org/officeDocument/2006/relationships" id="2147483648" r:id="rId1"/>
   </p:sldMasterIdLst>
   <p:notesMasterIdLst>
-    <p:notesMasterId r:id="Rfe02a0bc03cb4816"/>
+    <p:notesMasterId r:id="Rdf7c9a1f8d864867"/>
   </p:notesMasterIdLst>
   <p:sldIdLst>
-    <p:sldId id="256" r:id="Rf8089036ad7d4fd6"/>
+    <p:sldId id="256" r:id="R3060392dc2214d56"/>
   </p:sldIdLst>
   <p:sldSz cx="12192000" cy="6858000" type="screen16x9"/>
   <p:notesSz cx="6858000" cy="9144000"/>
@@ -337,13 +337,13 @@
         <a:srgbClr val="E7E6E6"/>
       </a:lt2>
       <a:accent1>
-        <a:srgbClr val="183B56"/>
+        <a:srgbClr val="C00000"/>
       </a:accent1>
       <a:accent2>
-        <a:srgbClr val="008C95"/>
+        <a:srgbClr val="70AD47"/>
       </a:accent2>
       <a:accent3>
-        <a:srgbClr val="DF973E"/>
+        <a:srgbClr val="ED7D31"/>
       </a:accent3>
       <a:accent4>
         <a:srgbClr val="FFC000"/>
@@ -821,7 +821,7 @@
               </a:lnSpc>
               <a:defRPr sz="3000" b="1">
                 <a:solidFill>
-                  <a:srgbClr val="183B56"/>
+                  <a:srgbClr val="C00000"/>
                 </a:solidFill>
                 <a:latin typeface="Arial"/>
                 <a:ea typeface="Arial"/>
@@ -830,7 +830,7 @@
             <a:r>
               <a:rPr lang="en-US" sz="3000" b="1">
                 <a:solidFill>
-                  <a:srgbClr val="183B56"/>
+                  <a:srgbClr val="C00000"/>
                 </a:solidFill>
                 <a:latin typeface="Arial"/>
               </a:rPr>
@@ -839,7 +839,7 @@
             <a:r>
               <a:rPr lang="en-US" sz="3000" b="1">
                 <a:solidFill>
-                  <a:srgbClr val="183B56"/>
+                  <a:srgbClr val="C00000"/>
                 </a:solidFill>
                 <a:latin typeface="Arial"/>
               </a:rPr>
@@ -848,7 +848,7 @@
             <a:r>
               <a:rPr lang="en-US" sz="3000" b="1">
                 <a:solidFill>
-                  <a:srgbClr val="183B56"/>
+                  <a:srgbClr val="C00000"/>
                 </a:solidFill>
                 <a:latin typeface="Arial"/>
               </a:rPr>
@@ -872,10 +872,12 @@
             <a:avLst/>
           </a:prstGeom>
           <a:solidFill>
-            <a:srgbClr val="008C95"/>
+            <a:srgbClr val="C55A11"/>
           </a:solidFill>
           <a:ln>
-            <a:noFill/>
+            <a:solidFill>
+              <a:srgbClr val="C55A11"/>
+            </a:solidFill>
           </a:ln>
         </p:spPr>
         <p:txBody>
@@ -886,7 +888,7 @@
           <a:p>
             <a:endParaRPr lang="en-US" sz="1800">
               <a:solidFill>
-                <a:srgbClr val="20354A"/>
+                <a:srgbClr val="C55A11"/>
               </a:solidFill>
               <a:latin typeface="Arial"/>
               <a:ea typeface="Arial"/>
@@ -911,7 +913,7 @@
             </a:avLst>
           </a:prstGeom>
           <a:solidFill>
-            <a:srgbClr val="EAF4F3"/>
+            <a:srgbClr val="F1F7EC"/>
           </a:solidFill>
           <a:ln>
             <a:noFill/>
@@ -925,7 +927,7 @@
           <a:p>
             <a:endParaRPr lang="en-US" sz="1800">
               <a:solidFill>
-                <a:srgbClr val="20354A"/>
+                <a:srgbClr val="1F1F1F"/>
               </a:solidFill>
               <a:latin typeface="Arial"/>
               <a:ea typeface="Arial"/>
@@ -948,7 +950,7 @@
             <a:avLst/>
           </a:prstGeom>
           <a:solidFill>
-            <a:srgbClr val="BDCBD4"/>
+            <a:srgbClr val="D1D1D1"/>
           </a:solidFill>
           <a:ln>
             <a:noFill/>
@@ -962,7 +964,7 @@
           <a:p>
             <a:endParaRPr lang="en-US" sz="1800">
               <a:solidFill>
-                <a:srgbClr val="20354A"/>
+                <a:srgbClr val="1F1F1F"/>
               </a:solidFill>
               <a:latin typeface="Arial"/>
               <a:ea typeface="Arial"/>
@@ -998,7 +1000,7 @@
             <a:pPr algn="l">
               <a:defRPr sz="2000" b="1">
                 <a:solidFill>
-                  <a:srgbClr val="183B56"/>
+                  <a:srgbClr val="333333"/>
                 </a:solidFill>
                 <a:latin typeface="Arial"/>
                 <a:ea typeface="Arial"/>
@@ -1007,7 +1009,7 @@
             <a:r>
               <a:rPr sz="2000" b="1">
                 <a:solidFill>
-                  <a:srgbClr val="183B56"/>
+                  <a:srgbClr val="333333"/>
                 </a:solidFill>
                 <a:latin typeface="Arial"/>
               </a:rPr>
@@ -1031,7 +1033,7 @@
             <a:avLst/>
           </a:prstGeom>
           <a:solidFill>
-            <a:srgbClr val="008C95"/>
+            <a:srgbClr val="70AD47"/>
           </a:solidFill>
           <a:ln>
             <a:noFill/>
@@ -1045,7 +1047,7 @@
           <a:p>
             <a:endParaRPr lang="en-US" sz="1800">
               <a:solidFill>
-                <a:srgbClr val="20354A"/>
+                <a:srgbClr val="1F1F1F"/>
               </a:solidFill>
               <a:latin typeface="Arial"/>
               <a:ea typeface="Arial"/>
@@ -1081,7 +1083,7 @@
             <a:r>
               <a:rPr lang="en-US" sz="1700">
                 <a:solidFill>
-                  <a:srgbClr val="20354A"/>
+                  <a:srgbClr val="1F1F1F"/>
                 </a:solidFill>
                 <a:latin typeface="Arial"/>
                 <a:ea typeface="Arial"/>
@@ -1093,7 +1095,7 @@
             <a:r>
               <a:rPr lang="en-US" sz="1700">
                 <a:solidFill>
-                  <a:srgbClr val="20354A"/>
+                  <a:srgbClr val="1F1F1F"/>
                 </a:solidFill>
                 <a:latin typeface="Arial"/>
                 <a:ea typeface="Arial"/>
@@ -1118,7 +1120,7 @@
             <a:avLst/>
           </a:prstGeom>
           <a:solidFill>
-            <a:srgbClr val="008C95"/>
+            <a:srgbClr val="70AD47"/>
           </a:solidFill>
           <a:ln>
             <a:noFill/>
@@ -1132,7 +1134,7 @@
           <a:p>
             <a:endParaRPr lang="en-US" sz="1800">
               <a:solidFill>
-                <a:srgbClr val="20354A"/>
+                <a:srgbClr val="1F1F1F"/>
               </a:solidFill>
               <a:latin typeface="Arial"/>
               <a:ea typeface="Arial"/>
@@ -1168,7 +1170,7 @@
             <a:r>
               <a:rPr lang="en-US" sz="1700">
                 <a:solidFill>
-                  <a:srgbClr val="20354A"/>
+                  <a:srgbClr val="1F1F1F"/>
                 </a:solidFill>
                 <a:latin typeface="Arial"/>
                 <a:ea typeface="Arial"/>
@@ -1180,7 +1182,7 @@
             <a:r>
               <a:rPr lang="en-US" sz="1700">
                 <a:solidFill>
-                  <a:srgbClr val="20354A"/>
+                  <a:srgbClr val="1F1F1F"/>
                 </a:solidFill>
                 <a:latin typeface="Arial"/>
                 <a:ea typeface="Arial"/>
@@ -1207,7 +1209,7 @@
             </a:avLst>
           </a:prstGeom>
           <a:solidFill>
-            <a:srgbClr val="F1F5F8"/>
+            <a:srgbClr val="F5F5F5"/>
           </a:solidFill>
           <a:ln>
             <a:noFill/>
@@ -1221,7 +1223,7 @@
           <a:p>
             <a:endParaRPr lang="en-US" sz="1800">
               <a:solidFill>
-                <a:srgbClr val="20354A"/>
+                <a:srgbClr val="1F1F1F"/>
               </a:solidFill>
               <a:latin typeface="Arial"/>
               <a:ea typeface="Arial"/>
@@ -1244,7 +1246,7 @@
             <a:avLst/>
           </a:prstGeom>
           <a:solidFill>
-            <a:srgbClr val="BDCBD4"/>
+            <a:srgbClr val="D1D1D1"/>
           </a:solidFill>
           <a:ln>
             <a:noFill/>
@@ -1258,7 +1260,7 @@
           <a:p>
             <a:endParaRPr lang="en-US" sz="1800">
               <a:solidFill>
-                <a:srgbClr val="20354A"/>
+                <a:srgbClr val="1F1F1F"/>
               </a:solidFill>
               <a:latin typeface="Arial"/>
               <a:ea typeface="Arial"/>
@@ -1294,7 +1296,7 @@
             <a:r>
               <a:rPr lang="en-US" sz="2000" b="1">
                 <a:solidFill>
-                  <a:srgbClr val="183B56"/>
+                  <a:srgbClr val="333333"/>
                 </a:solidFill>
                 <a:latin typeface="Arial"/>
                 <a:ea typeface="Arial"/>
@@ -1306,7 +1308,7 @@
             <a:r>
               <a:rPr lang="en-US" sz="2000" b="1">
                 <a:solidFill>
-                  <a:srgbClr val="183B56"/>
+                  <a:srgbClr val="333333"/>
                 </a:solidFill>
                 <a:latin typeface="Arial"/>
                 <a:ea typeface="Arial"/>
@@ -1331,7 +1333,7 @@
             <a:avLst/>
           </a:prstGeom>
           <a:solidFill>
-            <a:srgbClr val="008C95"/>
+            <a:srgbClr val="70AD47"/>
           </a:solidFill>
           <a:ln>
             <a:noFill/>
@@ -1345,7 +1347,7 @@
           <a:p>
             <a:endParaRPr lang="en-US" sz="1800">
               <a:solidFill>
-                <a:srgbClr val="20354A"/>
+                <a:srgbClr val="1F1F1F"/>
               </a:solidFill>
               <a:latin typeface="Arial"/>
               <a:ea typeface="Arial"/>
@@ -1381,7 +1383,7 @@
             <a:r>
               <a:rPr lang="en-US" sz="1700">
                 <a:solidFill>
-                  <a:srgbClr val="20354A"/>
+                  <a:srgbClr val="1F1F1F"/>
                 </a:solidFill>
                 <a:latin typeface="Arial"/>
                 <a:ea typeface="Arial"/>
@@ -1393,7 +1395,7 @@
             <a:r>
               <a:rPr lang="en-US" sz="1700">
                 <a:solidFill>
-                  <a:srgbClr val="20354A"/>
+                  <a:srgbClr val="1F1F1F"/>
                 </a:solidFill>
                 <a:latin typeface="Arial"/>
                 <a:ea typeface="Arial"/>
@@ -1418,7 +1420,7 @@
             <a:avLst/>
           </a:prstGeom>
           <a:solidFill>
-            <a:srgbClr val="008C95"/>
+            <a:srgbClr val="70AD47"/>
           </a:solidFill>
           <a:ln>
             <a:noFill/>
@@ -1432,7 +1434,7 @@
           <a:p>
             <a:endParaRPr lang="en-US" sz="1800">
               <a:solidFill>
-                <a:srgbClr val="20354A"/>
+                <a:srgbClr val="1F1F1F"/>
               </a:solidFill>
               <a:latin typeface="Arial"/>
               <a:ea typeface="Arial"/>
@@ -1468,7 +1470,7 @@
             <a:pPr algn="l">
               <a:defRPr sz="1700" b="0">
                 <a:solidFill>
-                  <a:srgbClr val="20354A"/>
+                  <a:srgbClr val="1F1F1F"/>
                 </a:solidFill>
                 <a:latin typeface="Arial"/>
                 <a:ea typeface="Arial"/>
@@ -1477,7 +1479,7 @@
             <a:r>
               <a:rPr lang="en-US" sz="1700">
                 <a:solidFill>
-                  <a:srgbClr val="20354A"/>
+                  <a:srgbClr val="1F1F1F"/>
                 </a:solidFill>
               </a:rPr>
               <a:t>Internal states from different cycle</a:t>
@@ -1485,7 +1487,7 @@
             <a:r>
               <a:rPr lang="en-US" sz="1700">
                 <a:solidFill>
-                  <a:srgbClr val="20354A"/>
+                  <a:srgbClr val="1F1F1F"/>
                 </a:solidFill>
               </a:rPr>
               <a:t xml:space="preserve"> </a:t>
@@ -1493,7 +1495,7 @@
             <a:r>
               <a:rPr lang="en-US" sz="1700">
                 <a:solidFill>
-                  <a:srgbClr val="20354A"/>
+                  <a:srgbClr val="1F1F1F"/>
                 </a:solidFill>
               </a:rPr>
               <a:t>can not be replayed</a:t>
@@ -1518,7 +1520,7 @@
             </a:avLst>
           </a:prstGeom>
           <a:solidFill>
-            <a:srgbClr val="FCF4E8"/>
+            <a:srgbClr val="FFF3EF"/>
           </a:solidFill>
           <a:ln>
             <a:noFill/>
@@ -1532,7 +1534,7 @@
           <a:p>
             <a:endParaRPr lang="en-US" sz="1800">
               <a:solidFill>
-                <a:srgbClr val="20354A"/>
+                <a:srgbClr val="1F1F1F"/>
               </a:solidFill>
               <a:latin typeface="Arial"/>
               <a:ea typeface="Arial"/>
@@ -1555,7 +1557,7 @@
             <a:avLst/>
           </a:prstGeom>
           <a:solidFill>
-            <a:srgbClr val="BDCBD4"/>
+            <a:srgbClr val="D1D1D1"/>
           </a:solidFill>
           <a:ln>
             <a:noFill/>
@@ -1569,7 +1571,7 @@
           <a:p>
             <a:endParaRPr lang="en-US" sz="1800">
               <a:solidFill>
-                <a:srgbClr val="20354A"/>
+                <a:srgbClr val="1F1F1F"/>
               </a:solidFill>
               <a:latin typeface="Arial"/>
               <a:ea typeface="Arial"/>
@@ -1605,7 +1607,7 @@
             <a:r>
               <a:rPr lang="en-US" sz="2000" b="1">
                 <a:solidFill>
-                  <a:srgbClr val="183B56"/>
+                  <a:srgbClr val="333333"/>
                 </a:solidFill>
                 <a:latin typeface="Arial"/>
                 <a:ea typeface="Arial"/>
@@ -1617,7 +1619,7 @@
             <a:r>
               <a:rPr lang="en-US" sz="2000" b="1">
                 <a:solidFill>
-                  <a:srgbClr val="183B56"/>
+                  <a:srgbClr val="333333"/>
                 </a:solidFill>
                 <a:latin typeface="Arial"/>
                 <a:ea typeface="Arial"/>
@@ -1642,7 +1644,7 @@
             <a:avLst/>
           </a:prstGeom>
           <a:solidFill>
-            <a:srgbClr val="008C95"/>
+            <a:srgbClr val="70AD47"/>
           </a:solidFill>
           <a:ln>
             <a:noFill/>
@@ -1656,7 +1658,7 @@
           <a:p>
             <a:endParaRPr lang="en-US" sz="1800">
               <a:solidFill>
-                <a:srgbClr val="20354A"/>
+                <a:srgbClr val="1F1F1F"/>
               </a:solidFill>
               <a:latin typeface="Arial"/>
               <a:ea typeface="Arial"/>
@@ -1692,7 +1694,7 @@
             <a:r>
               <a:rPr lang="en-US" sz="1700">
                 <a:solidFill>
-                  <a:srgbClr val="20354A"/>
+                  <a:srgbClr val="1F1F1F"/>
                 </a:solidFill>
                 <a:latin typeface="Arial"/>
                 <a:ea typeface="Arial"/>
@@ -1717,7 +1719,7 @@
             <a:avLst/>
           </a:prstGeom>
           <a:solidFill>
-            <a:srgbClr val="008C95"/>
+            <a:srgbClr val="70AD47"/>
           </a:solidFill>
           <a:ln>
             <a:noFill/>
@@ -1731,7 +1733,7 @@
           <a:p>
             <a:endParaRPr lang="en-US" sz="1800">
               <a:solidFill>
-                <a:srgbClr val="20354A"/>
+                <a:srgbClr val="1F1F1F"/>
               </a:solidFill>
               <a:latin typeface="Arial"/>
               <a:ea typeface="Arial"/>
@@ -1767,7 +1769,7 @@
             <a:r>
               <a:rPr lang="en-US" sz="1700">
                 <a:solidFill>
-                  <a:srgbClr val="20354A"/>
+                  <a:srgbClr val="1F1F1F"/>
                 </a:solidFill>
                 <a:latin typeface="Arial"/>
                 <a:ea typeface="Arial"/>
@@ -1779,7 +1781,7 @@
             <a:r>
               <a:rPr lang="en-US" sz="1700">
                 <a:solidFill>
-                  <a:srgbClr val="20354A"/>
+                  <a:srgbClr val="1F1F1F"/>
                 </a:solidFill>
                 <a:latin typeface="Arial"/>
                 <a:ea typeface="Arial"/>
@@ -1806,7 +1808,7 @@
             </a:avLst>
           </a:prstGeom>
           <a:solidFill>
-            <a:srgbClr val="EAF4F3"/>
+            <a:srgbClr val="F1F7EC"/>
           </a:solidFill>
           <a:ln>
             <a:noFill/>
@@ -1820,7 +1822,7 @@
           <a:p>
             <a:endParaRPr lang="en-US" sz="1800">
               <a:solidFill>
-                <a:srgbClr val="20354A"/>
+                <a:srgbClr val="1F1F1F"/>
               </a:solidFill>
               <a:latin typeface="Arial"/>
               <a:ea typeface="Arial"/>
@@ -1843,7 +1845,7 @@
             <a:avLst/>
           </a:prstGeom>
           <a:solidFill>
-            <a:srgbClr val="BDCBD4"/>
+            <a:srgbClr val="D1D1D1"/>
           </a:solidFill>
           <a:ln>
             <a:noFill/>
@@ -1857,7 +1859,7 @@
           <a:p>
             <a:endParaRPr lang="en-US" sz="1800">
               <a:solidFill>
-                <a:srgbClr val="20354A"/>
+                <a:srgbClr val="1F1F1F"/>
               </a:solidFill>
               <a:latin typeface="Arial"/>
               <a:ea typeface="Arial"/>
@@ -1893,7 +1895,7 @@
             <a:pPr algn="l">
               <a:defRPr sz="2000" b="1">
                 <a:solidFill>
-                  <a:srgbClr val="183B56"/>
+                  <a:srgbClr val="333333"/>
                 </a:solidFill>
                 <a:latin typeface="Arial"/>
                 <a:ea typeface="Arial"/>
@@ -1902,7 +1904,7 @@
             <a:r>
               <a:rPr sz="2000" b="1">
                 <a:solidFill>
-                  <a:srgbClr val="183B56"/>
+                  <a:srgbClr val="333333"/>
                 </a:solidFill>
                 <a:latin typeface="Arial"/>
               </a:rPr>
@@ -1926,7 +1928,7 @@
             <a:avLst/>
           </a:prstGeom>
           <a:solidFill>
-            <a:srgbClr val="008C95"/>
+            <a:srgbClr val="70AD47"/>
           </a:solidFill>
           <a:ln>
             <a:noFill/>
@@ -1940,7 +1942,7 @@
           <a:p>
             <a:endParaRPr lang="en-US" sz="1800">
               <a:solidFill>
-                <a:srgbClr val="20354A"/>
+                <a:srgbClr val="1F1F1F"/>
               </a:solidFill>
               <a:latin typeface="Arial"/>
               <a:ea typeface="Arial"/>
@@ -1976,7 +1978,7 @@
             <a:r>
               <a:rPr lang="en-US" sz="1700">
                 <a:solidFill>
-                  <a:srgbClr val="20354A"/>
+                  <a:srgbClr val="1F1F1F"/>
                 </a:solidFill>
                 <a:latin typeface="Arial"/>
                 <a:ea typeface="Arial"/>
@@ -1988,7 +1990,7 @@
             <a:r>
               <a:rPr lang="en-US" sz="1700">
                 <a:solidFill>
-                  <a:srgbClr val="20354A"/>
+                  <a:srgbClr val="1F1F1F"/>
                 </a:solidFill>
                 <a:latin typeface="Arial"/>
                 <a:ea typeface="Arial"/>
@@ -2013,7 +2015,7 @@
             <a:avLst/>
           </a:prstGeom>
           <a:solidFill>
-            <a:srgbClr val="008C95"/>
+            <a:srgbClr val="70AD47"/>
           </a:solidFill>
           <a:ln>
             <a:noFill/>
@@ -2027,7 +2029,7 @@
           <a:p>
             <a:endParaRPr lang="en-US" sz="1800">
               <a:solidFill>
-                <a:srgbClr val="20354A"/>
+                <a:srgbClr val="1F1F1F"/>
               </a:solidFill>
               <a:latin typeface="Arial"/>
               <a:ea typeface="Arial"/>
@@ -2063,7 +2065,7 @@
             <a:pPr algn="l">
               <a:defRPr sz="1700" b="0">
                 <a:solidFill>
-                  <a:srgbClr val="20354A"/>
+                  <a:srgbClr val="1F1F1F"/>
                 </a:solidFill>
                 <a:latin typeface="Arial"/>
                 <a:ea typeface="Arial"/>
@@ -2072,7 +2074,7 @@
             <a:r>
               <a:rPr sz="1700">
                 <a:solidFill>
-                  <a:srgbClr val="20354A"/>
+                  <a:srgbClr val="1F1F1F"/>
                 </a:solidFill>
                 <a:latin typeface="Arial"/>
               </a:rPr>
@@ -2090,7 +2092,7 @@
           <p:nvPr/>
         </p:nvPicPr>
         <p:blipFill>
-          <a:blip xmlns:r="http://schemas.openxmlformats.org/officeDocument/2006/relationships" r:embed="Rb144485caeb84593"/>
+          <a:blip xmlns:r="http://schemas.openxmlformats.org/officeDocument/2006/relationships" r:embed="Rba598bb6ef214e83"/>
           <a:srcRect l="21371" t="23684" r="21291" b="20972"/>
           <a:stretch>
             <a:fillRect/>
@@ -2115,7 +2117,7 @@
           <p:nvPr/>
         </p:nvPicPr>
         <p:blipFill>
-          <a:blip xmlns:r="http://schemas.openxmlformats.org/officeDocument/2006/relationships" r:embed="Rf2553ab50a6a4a91"/>
+          <a:blip xmlns:r="http://schemas.openxmlformats.org/officeDocument/2006/relationships" r:embed="Re91805885ebe439e"/>
           <a:srcRect l="21371" t="23684" r="21291" b="20972"/>
           <a:stretch>
             <a:fillRect/>
@@ -2140,7 +2142,7 @@
           <p:nvPr/>
         </p:nvPicPr>
         <p:blipFill>
-          <a:blip xmlns:r="http://schemas.openxmlformats.org/officeDocument/2006/relationships" r:embed="Rf26cb0b57301460c"/>
+          <a:blip xmlns:r="http://schemas.openxmlformats.org/officeDocument/2006/relationships" r:embed="R08cfa58610394cd8"/>
           <a:srcRect l="13078" t="10047" r="12918" b="10526"/>
           <a:stretch>
             <a:fillRect/>
@@ -2172,7 +2174,7 @@
           </a:prstGeom>
           <a:ln w="29210">
             <a:solidFill>
-              <a:srgbClr val="DF973E"/>
+              <a:srgbClr val="ED7D31"/>
             </a:solidFill>
           </a:ln>
         </p:spPr>
@@ -2193,7 +2195,7 @@
           </a:prstGeom>
           <a:ln w="29210">
             <a:solidFill>
-              <a:srgbClr val="DF973E"/>
+              <a:srgbClr val="ED7D31"/>
             </a:solidFill>
           </a:ln>
         </p:spPr>
@@ -2214,7 +2216,7 @@
           </a:prstGeom>
           <a:ln w="29210">
             <a:solidFill>
-              <a:srgbClr val="DF973E"/>
+              <a:srgbClr val="ED7D31"/>
             </a:solidFill>
           </a:ln>
         </p:spPr>
@@ -2235,7 +2237,7 @@
           </a:prstGeom>
           <a:ln w="29210">
             <a:solidFill>
-              <a:srgbClr val="DF973E"/>
+              <a:srgbClr val="ED7D31"/>
             </a:solidFill>
           </a:ln>
         </p:spPr>
@@ -2256,7 +2258,7 @@
           </a:prstGeom>
           <a:ln w="29210">
             <a:solidFill>
-              <a:srgbClr val="DF973E"/>
+              <a:srgbClr val="ED7D31"/>
             </a:solidFill>
           </a:ln>
         </p:spPr>
@@ -2277,7 +2279,7 @@
           </a:prstGeom>
           <a:ln w="29210">
             <a:solidFill>
-              <a:srgbClr val="DF973E"/>
+              <a:srgbClr val="ED7D31"/>
             </a:solidFill>
           </a:ln>
         </p:spPr>
@@ -2298,7 +2300,7 @@
           </a:prstGeom>
           <a:ln w="29210">
             <a:solidFill>
-              <a:srgbClr val="DF973E"/>
+              <a:srgbClr val="ED7D31"/>
             </a:solidFill>
           </a:ln>
         </p:spPr>
@@ -2319,7 +2321,7 @@
           </a:prstGeom>
           <a:ln w="29210">
             <a:solidFill>
-              <a:srgbClr val="DF973E"/>
+              <a:srgbClr val="ED7D31"/>
             </a:solidFill>
           </a:ln>
         </p:spPr>
@@ -2340,7 +2342,7 @@
           </a:prstGeom>
           <a:ln w="29210">
             <a:solidFill>
-              <a:srgbClr val="DF973E"/>
+              <a:srgbClr val="ED7D31"/>
             </a:solidFill>
           </a:ln>
         </p:spPr>
@@ -2373,7 +2375,7 @@
             <a:pPr algn="ctr">
               <a:defRPr sz="1400" b="0">
                 <a:solidFill>
-                  <a:srgbClr val="183B56"/>
+                  <a:srgbClr val="333333"/>
                 </a:solidFill>
                 <a:latin typeface="Arial"/>
                 <a:ea typeface="Arial"/>
@@ -2382,7 +2384,7 @@
             <a:r>
               <a:rPr sz="1400">
                 <a:solidFill>
-                  <a:srgbClr val="183B56"/>
+                  <a:srgbClr val="333333"/>
                 </a:solidFill>
                 <a:latin typeface="Arial"/>
               </a:rPr>
@@ -2400,7 +2402,7 @@
           <p:nvPr/>
         </p:nvPicPr>
         <p:blipFill>
-          <a:blip xmlns:r="http://schemas.openxmlformats.org/officeDocument/2006/relationships" r:embed="Rcdb761fd2a674750"/>
+          <a:blip xmlns:r="http://schemas.openxmlformats.org/officeDocument/2006/relationships" r:embed="R989e085673fb4f3e"/>
           <a:srcRect l="21371" t="23684" r="21291" b="20972"/>
           <a:stretch>
             <a:fillRect/>
@@ -2425,7 +2427,7 @@
           <p:nvPr/>
         </p:nvPicPr>
         <p:blipFill>
-          <a:blip xmlns:r="http://schemas.openxmlformats.org/officeDocument/2006/relationships" r:embed="R2a6d719ca21c4a6a"/>
+          <a:blip xmlns:r="http://schemas.openxmlformats.org/officeDocument/2006/relationships" r:embed="R883baff142c8421e"/>
           <a:srcRect l="21371" t="23684" r="21291" b="20972"/>
           <a:stretch>
             <a:fillRect/>
@@ -2450,7 +2452,7 @@
           <p:nvPr/>
         </p:nvPicPr>
         <p:blipFill>
-          <a:blip xmlns:r="http://schemas.openxmlformats.org/officeDocument/2006/relationships" r:embed="Rb147318bc6da4c8d"/>
+          <a:blip xmlns:r="http://schemas.openxmlformats.org/officeDocument/2006/relationships" r:embed="R1503ae1180e34bc6"/>
           <a:srcRect l="21371" t="23684" r="21291" b="20972"/>
           <a:stretch>
             <a:fillRect/>
@@ -2485,7 +2487,7 @@
           </a:prstGeom>
           <a:ln w="25400">
             <a:solidFill>
-              <a:srgbClr val="DF973E"/>
+              <a:srgbClr val="ED7D31"/>
             </a:solidFill>
           </a:ln>
         </p:spPr>
@@ -2509,7 +2511,7 @@
           </a:prstGeom>
           <a:ln w="25400">
             <a:solidFill>
-              <a:srgbClr val="DF973E"/>
+              <a:srgbClr val="ED7D31"/>
             </a:solidFill>
           </a:ln>
         </p:spPr>
@@ -2533,7 +2535,7 @@
           </a:prstGeom>
           <a:ln w="25400">
             <a:solidFill>
-              <a:srgbClr val="DF973E"/>
+              <a:srgbClr val="ED7D31"/>
             </a:solidFill>
           </a:ln>
         </p:spPr>
@@ -2547,7 +2549,7 @@
           <p:nvPr/>
         </p:nvPicPr>
         <p:blipFill>
-          <a:blip xmlns:r="http://schemas.openxmlformats.org/officeDocument/2006/relationships" r:embed="Re43f698f7a5047dd"/>
+          <a:blip xmlns:r="http://schemas.openxmlformats.org/officeDocument/2006/relationships" r:embed="Re43803a846b54ae8"/>
           <a:srcRect l="11164" t="11323" r="10765" b="10606"/>
           <a:stretch>
             <a:fillRect/>
@@ -2592,7 +2594,7 @@
             <a:r>
               <a:rPr lang="en-US" sz="1300">
                 <a:solidFill>
-                  <a:srgbClr val="183B56"/>
+                  <a:srgbClr val="333333"/>
                 </a:solidFill>
                 <a:latin typeface="Arial"/>
                 <a:ea typeface="Arial"/>
@@ -2611,7 +2613,7 @@
           <p:nvPr/>
         </p:nvPicPr>
         <p:blipFill>
-          <a:blip xmlns:r="http://schemas.openxmlformats.org/officeDocument/2006/relationships" r:embed="R44dc73d7393544e1"/>
+          <a:blip xmlns:r="http://schemas.openxmlformats.org/officeDocument/2006/relationships" r:embed="R2a783bd662d8467d"/>
           <a:srcRect l="21371" t="23684" r="21291" b="20972"/>
           <a:stretch>
             <a:fillRect/>
@@ -2636,7 +2638,7 @@
           <p:nvPr/>
         </p:nvPicPr>
         <p:blipFill>
-          <a:blip xmlns:r="http://schemas.openxmlformats.org/officeDocument/2006/relationships" r:embed="Rd011f53120cb4f57"/>
+          <a:blip xmlns:r="http://schemas.openxmlformats.org/officeDocument/2006/relationships" r:embed="R63d2241641584ba5"/>
           <a:srcRect l="21371" t="23684" r="21291" b="20972"/>
           <a:stretch>
             <a:fillRect/>
@@ -2661,7 +2663,7 @@
           <p:nvPr/>
         </p:nvPicPr>
         <p:blipFill>
-          <a:blip xmlns:r="http://schemas.openxmlformats.org/officeDocument/2006/relationships" r:embed="R913b6df6eb66497a"/>
+          <a:blip xmlns:r="http://schemas.openxmlformats.org/officeDocument/2006/relationships" r:embed="Re0984c45fad74436"/>
           <a:srcRect l="21371" t="23684" r="21291" b="20972"/>
           <a:stretch>
             <a:fillRect/>
@@ -2706,7 +2708,7 @@
             <a:r>
               <a:rPr lang="en-US" sz="1400">
                 <a:solidFill>
-                  <a:srgbClr val="183B56"/>
+                  <a:srgbClr val="333333"/>
                 </a:solidFill>
                 <a:latin typeface="Arial"/>
                 <a:ea typeface="Arial"/>
@@ -2725,7 +2727,7 @@
           <p:nvPr/>
         </p:nvPicPr>
         <p:blipFill>
-          <a:blip xmlns:r="http://schemas.openxmlformats.org/officeDocument/2006/relationships" r:embed="Rd7d651cdb8f844b3"/>
+          <a:blip xmlns:r="http://schemas.openxmlformats.org/officeDocument/2006/relationships" r:embed="R22fc9bd161c14e36"/>
           <a:srcRect l="16746" t="16427" r="16746" b="11961"/>
           <a:stretch>
             <a:fillRect/>
@@ -2757,7 +2759,7 @@
           </a:prstGeom>
           <a:ln w="25400">
             <a:solidFill>
-              <a:srgbClr val="008C95"/>
+              <a:srgbClr val="70AD47"/>
             </a:solidFill>
           </a:ln>
         </p:spPr>
@@ -2778,7 +2780,7 @@
           </a:prstGeom>
           <a:ln w="25400">
             <a:solidFill>
-              <a:srgbClr val="008C95"/>
+              <a:srgbClr val="70AD47"/>
             </a:solidFill>
           </a:ln>
         </p:spPr>
@@ -2799,7 +2801,7 @@
           </a:prstGeom>
           <a:ln w="25400">
             <a:solidFill>
-              <a:srgbClr val="008C95"/>
+              <a:srgbClr val="70AD47"/>
             </a:solidFill>
           </a:ln>
         </p:spPr>
@@ -2820,7 +2822,7 @@
           </a:prstGeom>
           <a:ln w="25400">
             <a:solidFill>
-              <a:srgbClr val="008C95"/>
+              <a:srgbClr val="70AD47"/>
             </a:solidFill>
           </a:ln>
         </p:spPr>
@@ -2841,7 +2843,7 @@
           </a:prstGeom>
           <a:ln w="25400">
             <a:solidFill>
-              <a:srgbClr val="008C95"/>
+              <a:srgbClr val="70AD47"/>
             </a:solidFill>
             <a:tailEnd type="triangle"/>
           </a:ln>
@@ -2876,7 +2878,7 @@
             <a:r>
               <a:rPr lang="en-US" sz="1300">
                 <a:solidFill>
-                  <a:srgbClr val="183B56"/>
+                  <a:srgbClr val="333333"/>
                 </a:solidFill>
                 <a:latin typeface="Arial"/>
                 <a:ea typeface="Arial"/>
@@ -2895,7 +2897,7 @@
           <p:nvPr/>
         </p:nvPicPr>
         <p:blipFill>
-          <a:blip xmlns:r="http://schemas.openxmlformats.org/officeDocument/2006/relationships" r:embed="R35795b82282b4a83"/>
+          <a:blip xmlns:r="http://schemas.openxmlformats.org/officeDocument/2006/relationships" r:embed="R35917c59115044f1"/>
           <a:srcRect l="15869" t="18660" r="15789" b="18660"/>
           <a:stretch>
             <a:fillRect/>
@@ -2940,7 +2942,7 @@
             <a:r>
               <a:rPr lang="en-US" sz="1300">
                 <a:solidFill>
-                  <a:srgbClr val="183B56"/>
+                  <a:srgbClr val="333333"/>
                 </a:solidFill>
                 <a:latin typeface="Arial"/>
                 <a:ea typeface="Arial"/>
@@ -2978,7 +2980,7 @@
             <a:pPr algn="l">
               <a:defRPr sz="1800" b="1">
                 <a:solidFill>
-                  <a:srgbClr val="183B56"/>
+                  <a:srgbClr val="333333"/>
                 </a:solidFill>
                 <a:latin typeface="Arial"/>
                 <a:ea typeface="Arial"/>
@@ -2987,7 +2989,7 @@
             <a:r>
               <a:rPr lang="en-US" b="1">
                 <a:solidFill>
-                  <a:srgbClr val="183B56"/>
+                  <a:srgbClr val="333333"/>
                 </a:solidFill>
               </a:rPr>
               <a:t>Academe</a:t>
@@ -2995,7 +2997,7 @@
             <a:r>
               <a:rPr lang="en-US" b="1">
                 <a:solidFill>
-                  <a:srgbClr val="183B56"/>
+                  <a:srgbClr val="333333"/>
                 </a:solidFill>
               </a:rPr>
               <a:t xml:space="preserve"> </a:t>
@@ -3003,7 +3005,7 @@
             <a:r>
               <a:rPr lang="en-US" b="1">
                 <a:solidFill>
-                  <a:srgbClr val="183B56"/>
+                  <a:srgbClr val="333333"/>
                 </a:solidFill>
               </a:rPr>
               <a:t>have made progress in individual fields, still gaps in Multi-FPGA Emulation system.</a:t>
@@ -3040,7 +3042,7 @@
             <a:r>
               <a:rPr lang="en-US" sz="1000">
                 <a:solidFill>
-                  <a:srgbClr val="607184"/>
+                  <a:srgbClr val="898989"/>
                 </a:solidFill>
                 <a:latin typeface="Arial"/>
                 <a:ea typeface="Arial"/>
@@ -3072,13 +3074,13 @@
         <a:srgbClr val="E7E6E6"/>
       </a:lt2>
       <a:accent1>
-        <a:srgbClr val="183B56"/>
+        <a:srgbClr val="C00000"/>
       </a:accent1>
       <a:accent2>
-        <a:srgbClr val="008C95"/>
+        <a:srgbClr val="70AD47"/>
       </a:accent2>
       <a:accent3>
-        <a:srgbClr val="DF973E"/>
+        <a:srgbClr val="ED7D31"/>
       </a:accent3>
       <a:accent4>
         <a:srgbClr val="FFC000"/>
